--- a/docs/submission.pptx
+++ b/docs/submission.pptx
@@ -3159,8 +3159,9 @@
                 <a:solidFill>
                   <a:srgbClr val="FFFFFF"/>
                 </a:solidFill>
-                <a:latin typeface="맑은 고딕"/>
+                <a:latin typeface="Arial"/>
                 <a:ea typeface="맑은 고딕"/>
+                <a:cs typeface="Arial"/>
               </a:rPr>
               <a:t>PlanIt</a:t>
             </a:r>
@@ -3195,8 +3196,9 @@
                 <a:solidFill>
                   <a:srgbClr val="F1F5F9"/>
                 </a:solidFill>
-                <a:latin typeface="맑은 고딕"/>
+                <a:latin typeface="Arial"/>
                 <a:ea typeface="맑은 고딕"/>
+                <a:cs typeface="Arial"/>
               </a:rPr>
               <a:t>할 일 + 일정 통합 웹 서비스</a:t>
             </a:r>
@@ -3231,8 +3233,9 @@
                 <a:solidFill>
                   <a:srgbClr val="F1F5F9"/>
                 </a:solidFill>
-                <a:latin typeface="맑은 고딕"/>
+                <a:latin typeface="Arial"/>
                 <a:ea typeface="맑은 고딕"/>
+                <a:cs typeface="Arial"/>
               </a:rPr>
               <a:t>컴퓨터공학부</a:t>
             </a:r>
@@ -3267,8 +3270,9 @@
                 <a:solidFill>
                   <a:srgbClr val="FFFFFF"/>
                 </a:solidFill>
-                <a:latin typeface="맑은 고딕"/>
+                <a:latin typeface="Arial"/>
                 <a:ea typeface="맑은 고딕"/>
+                <a:cs typeface="Arial"/>
               </a:rPr>
               <a:t>202100580  이정</a:t>
             </a:r>
@@ -3303,8 +3307,9 @@
                 <a:solidFill>
                   <a:srgbClr val="F1F5F9"/>
                 </a:solidFill>
-                <a:latin typeface="맑은 고딕"/>
+                <a:latin typeface="Arial"/>
                 <a:ea typeface="맑은 고딕"/>
+                <a:cs typeface="Arial"/>
               </a:rPr>
               <a:t>2026-1 Web Programming</a:t>
             </a:r>
@@ -3339,8 +3344,9 @@
                 <a:solidFill>
                   <a:srgbClr val="F1F5F9"/>
                 </a:solidFill>
-                <a:latin typeface="맑은 고딕"/>
+                <a:latin typeface="Arial"/>
                 <a:ea typeface="맑은 고딕"/>
+                <a:cs typeface="Arial"/>
               </a:rPr>
               <a:t>기말 프로젝트</a:t>
             </a:r>
@@ -3375,8 +3381,9 @@
                 <a:solidFill>
                   <a:srgbClr val="0F172A"/>
                 </a:solidFill>
-                <a:latin typeface="맑은 고딕"/>
+                <a:latin typeface="Arial"/>
                 <a:ea typeface="맑은 고딕"/>
+                <a:cs typeface="Arial"/>
               </a:rPr>
               <a:t>대학생을 위한 통합 일정 관리 서비스</a:t>
             </a:r>
@@ -3411,8 +3418,9 @@
                 <a:solidFill>
                   <a:srgbClr val="475569"/>
                 </a:solidFill>
-                <a:latin typeface="맑은 고딕"/>
+                <a:latin typeface="Arial"/>
                 <a:ea typeface="맑은 고딕"/>
+                <a:cs typeface="Arial"/>
               </a:rPr>
               <a:t>강의·미팅·시험(Event) 과 과제·보고서(Task) 를 한 화면에서.</a:t>
             </a:r>
@@ -3492,8 +3500,9 @@
                 <a:solidFill>
                   <a:srgbClr val="1D4ED8"/>
                 </a:solidFill>
-                <a:latin typeface="맑은 고딕"/>
+                <a:latin typeface="Arial"/>
                 <a:ea typeface="맑은 고딕"/>
+                <a:cs typeface="Arial"/>
               </a:rPr>
               <a:t>🌐 서비스 URL</a:t>
             </a:r>
@@ -3528,8 +3537,9 @@
                 <a:solidFill>
                   <a:srgbClr val="0F172A"/>
                 </a:solidFill>
-                <a:latin typeface="맑은 고딕"/>
+                <a:latin typeface="Arial"/>
                 <a:ea typeface="맑은 고딕"/>
+                <a:cs typeface="Arial"/>
               </a:rPr>
               <a:t>https://client-eight-ivory-60.vercel.app</a:t>
             </a:r>
@@ -3564,8 +3574,9 @@
                 <a:solidFill>
                   <a:srgbClr val="1D4ED8"/>
                 </a:solidFill>
-                <a:latin typeface="맑은 고딕"/>
+                <a:latin typeface="Arial"/>
                 <a:ea typeface="맑은 고딕"/>
+                <a:cs typeface="Arial"/>
               </a:rPr>
               <a:t>📦 GitHub Repository</a:t>
             </a:r>
@@ -3600,8 +3611,9 @@
                 <a:solidFill>
                   <a:srgbClr val="0F172A"/>
                 </a:solidFill>
-                <a:latin typeface="맑은 고딕"/>
+                <a:latin typeface="Arial"/>
                 <a:ea typeface="맑은 고딕"/>
+                <a:cs typeface="Arial"/>
               </a:rPr>
               <a:t>https://github.com/Pionia5375/2026-1-web-programming</a:t>
             </a:r>
@@ -3636,8 +3648,9 @@
                 <a:solidFill>
                   <a:srgbClr val="1D4ED8"/>
                 </a:solidFill>
-                <a:latin typeface="맑은 고딕"/>
+                <a:latin typeface="Arial"/>
                 <a:ea typeface="맑은 고딕"/>
+                <a:cs typeface="Arial"/>
               </a:rPr>
               <a:t>핵심 기능</a:t>
             </a:r>
@@ -3676,8 +3689,9 @@
                 <a:solidFill>
                   <a:srgbClr val="0F172A"/>
                 </a:solidFill>
-                <a:latin typeface="맑은 고딕"/>
+                <a:latin typeface="Arial"/>
                 <a:ea typeface="맑은 고딕"/>
+                <a:cs typeface="Arial"/>
               </a:rPr>
               <a:t>• 이메일/비밀번호 회원가입·로그인 (bcrypt + JWT 7일)</a:t>
             </a:r>
@@ -3693,8 +3707,9 @@
                 <a:solidFill>
                   <a:srgbClr val="0F172A"/>
                 </a:solidFill>
-                <a:latin typeface="맑은 고딕"/>
+                <a:latin typeface="Arial"/>
                 <a:ea typeface="맑은 고딕"/>
+                <a:cs typeface="Arial"/>
               </a:rPr>
               <a:t>• 할 일(Task) CRUD — 마감일, 우선순위, 검색·필터, 완료 토글</a:t>
             </a:r>
@@ -3710,8 +3725,9 @@
                 <a:solidFill>
                   <a:srgbClr val="0F172A"/>
                 </a:solidFill>
-                <a:latin typeface="맑은 고딕"/>
+                <a:latin typeface="Arial"/>
                 <a:ea typeface="맑은 고딕"/>
+                <a:cs typeface="Arial"/>
               </a:rPr>
               <a:t>• 일정(Event) CRUD — 시작/종료/장소</a:t>
             </a:r>
@@ -3727,8 +3743,9 @@
                 <a:solidFill>
                   <a:srgbClr val="0F172A"/>
                 </a:solidFill>
-                <a:latin typeface="맑은 고딕"/>
+                <a:latin typeface="Arial"/>
                 <a:ea typeface="맑은 고딕"/>
+                <a:cs typeface="Arial"/>
               </a:rPr>
               <a:t>• 통합 캘린더 (월/주/일/아젠다, 한국어) + 오늘 마감·오늘 일정 대시보드</a:t>
             </a:r>
@@ -3744,8 +3761,9 @@
                 <a:solidFill>
                   <a:srgbClr val="0F172A"/>
                 </a:solidFill>
-                <a:latin typeface="맑은 고딕"/>
+                <a:latin typeface="Arial"/>
                 <a:ea typeface="맑은 고딕"/>
+                <a:cs typeface="Arial"/>
               </a:rPr>
               <a:t>• 다크 모드, 마감 1시간 전 브라우저 알림(Notification API)</a:t>
             </a:r>
@@ -3780,8 +3798,9 @@
                 <a:solidFill>
                   <a:srgbClr val="1D4ED8"/>
                 </a:solidFill>
-                <a:latin typeface="맑은 고딕"/>
+                <a:latin typeface="Arial"/>
                 <a:ea typeface="맑은 고딕"/>
+                <a:cs typeface="Arial"/>
               </a:rPr>
               <a:t>기술 스택</a:t>
             </a:r>
@@ -3820,8 +3839,9 @@
                 <a:solidFill>
                   <a:srgbClr val="0F172A"/>
                 </a:solidFill>
-                <a:latin typeface="맑은 고딕"/>
+                <a:latin typeface="Arial"/>
                 <a:ea typeface="맑은 고딕"/>
+                <a:cs typeface="Arial"/>
               </a:rPr>
               <a:t>• Frontend: React + Vite + Tailwind + react-big-calendar (Vercel 배포)</a:t>
             </a:r>
@@ -3837,8 +3857,9 @@
                 <a:solidFill>
                   <a:srgbClr val="0F172A"/>
                 </a:solidFill>
-                <a:latin typeface="맑은 고딕"/>
+                <a:latin typeface="Arial"/>
                 <a:ea typeface="맑은 고딕"/>
+                <a:cs typeface="Arial"/>
               </a:rPr>
               <a:t>• Backend: Express + Prisma + JWT + bcrypt + zod (Render Docker 배포)</a:t>
             </a:r>
@@ -3854,8 +3875,9 @@
                 <a:solidFill>
                   <a:srgbClr val="0F172A"/>
                 </a:solidFill>
-                <a:latin typeface="맑은 고딕"/>
+                <a:latin typeface="Arial"/>
                 <a:ea typeface="맑은 고딕"/>
+                <a:cs typeface="Arial"/>
               </a:rPr>
               <a:t>• Database: PostgreSQL (Neon)  /  Reverse Proxy: Nginx (gzip + SPA fallback)</a:t>
             </a:r>
@@ -3871,8 +3893,9 @@
                 <a:solidFill>
                   <a:srgbClr val="0F172A"/>
                 </a:solidFill>
-                <a:latin typeface="맑은 고딕"/>
+                <a:latin typeface="Arial"/>
                 <a:ea typeface="맑은 고딕"/>
+                <a:cs typeface="Arial"/>
               </a:rPr>
               <a:t>• Web Storage: localStorage(JWT·테마) · sessionStorage(검색·뷰) · IndexedDB(오프라인 캐시)</a:t>
             </a:r>
@@ -3888,8 +3911,9 @@
                 <a:solidFill>
                   <a:srgbClr val="0F172A"/>
                 </a:solidFill>
-                <a:latin typeface="맑은 고딕"/>
+                <a:latin typeface="Arial"/>
                 <a:ea typeface="맑은 고딕"/>
+                <a:cs typeface="Arial"/>
               </a:rPr>
               <a:t>• CI/CD: GitHub Actions (build·syntax·docker compose) + 자동 배포</a:t>
             </a:r>
@@ -3967,8 +3991,9 @@
                 <a:solidFill>
                   <a:srgbClr val="FFFFFF"/>
                 </a:solidFill>
-                <a:latin typeface="맑은 고딕"/>
+                <a:latin typeface="Arial"/>
                 <a:ea typeface="맑은 고딕"/>
+                <a:cs typeface="Arial"/>
               </a:rPr>
               <a:t>LIVE on Vercel + Render</a:t>
             </a:r>
